--- a/docs/slides/项目制教学的管理方法_汇报.pptx
+++ b/docs/slides/项目制教学的管理方法_汇报.pptx
@@ -13712,7 +13712,7 @@
                 <a:latin typeface="Segoe UI"/>
                 <a:ea typeface="微软雅黑"/>
               </a:rPr>
-              <a:t>方向搞反了，就会去做「给 40 门课各建一张 300 点的图，再做 40×N 的映射」——那是 </a:t>
+              <a:t>方向搞反了，就会去做「给 28 门课各建一张 250 点的图，再做 28×N 的映射」——那是 </a:t>
             </a:r>
             <a:r>
               <a:rPr lang="zh-CN" altLang="en-US" sz="1900" b="1" dirty="0">

--- a/docs/slides/项目制教学的管理方法_汇报.pptx
+++ b/docs/slides/项目制教学的管理方法_汇报.pptx
@@ -1105,7 +1105,7 @@
                 <a:latin typeface="Segoe UI"/>
                 <a:ea typeface="微软雅黑"/>
               </a:rPr>
-              <a:t>64.3%</a:t>
+              <a:t>59.2%</a:t>
             </a:r>
             <a:r>
               <a:rPr lang="zh-CN" altLang="en-US" sz="1900" dirty="0">
@@ -1135,7 +1135,7 @@
                 <a:latin typeface="Segoe UI"/>
                 <a:ea typeface="微软雅黑"/>
               </a:rPr>
-              <a:t>（拿导师已标注的 154 条映射当标准答案自测）。</a:t>
+              <a:t>（拿导师已标注的 169 条映射当标准答案自测）。</a:t>
             </a:r>
           </a:p>
           <a:p>
@@ -1242,7 +1242,7 @@
                 <a:latin typeface="Segoe UI"/>
                 <a:ea typeface="微软雅黑"/>
               </a:rPr>
-              <a:t>沿依赖边扩展这一招把召回率从 47.4% 提到 64.3%，每个任务只多两条候选。这正是知识图谱的本职：回答「要做这个，还缺什么」。</a:t>
+              <a:t>沿依赖边扩展这一招把召回率从 44.4% 提到 59.2%，每个任务只多两条候选。这正是知识图谱的本职：回答「要做这个，还缺什么」。注意这个数字比图谱只有 284 个点时（64.3%）低了——图谱建得越全，候选空间越大，字面匹配越难，所以教师审核这一关只会更重要。</a:t>
             </a:r>
           </a:p>
         </p:txBody>
@@ -2685,8 +2685,8 @@
         </p:nvSpPr>
         <p:spPr>
           <a:xfrm>
-            <a:off x="2892400" y="4398429"/>
-            <a:ext cx="2062400" cy="1409571"/>
+            <a:off x="2892400" y="4270286"/>
+            <a:ext cx="2062400" cy="1537714"/>
           </a:xfrm>
           <a:prstGeom prst="roundRect">
             <a:avLst>
@@ -2716,7 +2716,7 @@
         </p:nvSpPr>
         <p:spPr>
           <a:xfrm>
-            <a:off x="2892400" y="4138429"/>
+            <a:off x="2892400" y="4010286"/>
             <a:ext cx="2062400" cy="220000"/>
           </a:xfrm>
           <a:prstGeom prst="rect">
@@ -2747,7 +2747,7 @@
                 <a:latin typeface="Segoe UI"/>
                 <a:ea typeface="微软雅黑"/>
               </a:rPr>
-              <a:t>11</a:t>
+              <a:t>12</a:t>
             </a:r>
           </a:p>
         </p:txBody>
@@ -2804,8 +2804,8 @@
         </p:nvSpPr>
         <p:spPr>
           <a:xfrm>
-            <a:off x="5064800" y="5039143"/>
-            <a:ext cx="2062400" cy="768857"/>
+            <a:off x="5064800" y="4142143"/>
+            <a:ext cx="2062400" cy="1665857"/>
           </a:xfrm>
           <a:prstGeom prst="roundRect">
             <a:avLst>
@@ -2835,7 +2835,7 @@
         </p:nvSpPr>
         <p:spPr>
           <a:xfrm>
-            <a:off x="5064800" y="4779143"/>
+            <a:off x="5064800" y="3882143"/>
             <a:ext cx="2062400" cy="220000"/>
           </a:xfrm>
           <a:prstGeom prst="rect">
@@ -2866,7 +2866,7 @@
                 <a:latin typeface="Segoe UI"/>
                 <a:ea typeface="微软雅黑"/>
               </a:rPr>
-              <a:t>6</a:t>
+              <a:t>13</a:t>
             </a:r>
           </a:p>
         </p:txBody>
@@ -2923,8 +2923,8 @@
         </p:nvSpPr>
         <p:spPr>
           <a:xfrm>
-            <a:off x="7237200" y="5039143"/>
-            <a:ext cx="2062400" cy="768857"/>
+            <a:off x="7237200" y="5784000"/>
+            <a:ext cx="2062400" cy="24000"/>
           </a:xfrm>
           <a:prstGeom prst="roundRect">
             <a:avLst>
@@ -2954,7 +2954,7 @@
         </p:nvSpPr>
         <p:spPr>
           <a:xfrm>
-            <a:off x="7237200" y="4779143"/>
+            <a:off x="7237200" y="5524000"/>
             <a:ext cx="2062400" cy="220000"/>
           </a:xfrm>
           <a:prstGeom prst="rect">
@@ -2985,7 +2985,7 @@
                 <a:latin typeface="Segoe UI"/>
                 <a:ea typeface="微软雅黑"/>
               </a:rPr>
-              <a:t>6</a:t>
+              <a:t>0</a:t>
             </a:r>
           </a:p>
         </p:txBody>
@@ -3042,8 +3042,8 @@
         </p:nvSpPr>
         <p:spPr>
           <a:xfrm>
-            <a:off x="9409600" y="4270286"/>
-            <a:ext cx="2062400" cy="1537714"/>
+            <a:off x="9409600" y="5784000"/>
+            <a:ext cx="2062400" cy="24000"/>
           </a:xfrm>
           <a:prstGeom prst="roundRect">
             <a:avLst>
@@ -3073,7 +3073,7 @@
         </p:nvSpPr>
         <p:spPr>
           <a:xfrm>
-            <a:off x="9409600" y="4010286"/>
+            <a:off x="9409600" y="5524000"/>
             <a:ext cx="2062400" cy="220000"/>
           </a:xfrm>
           <a:prstGeom prst="rect">
@@ -3104,7 +3104,7 @@
                 <a:latin typeface="Segoe UI"/>
                 <a:ea typeface="微软雅黑"/>
               </a:rPr>
-              <a:t>12</a:t>
+              <a:t>0</a:t>
             </a:r>
           </a:p>
         </p:txBody>
@@ -3192,7 +3192,7 @@
                 <a:latin typeface="Segoe UI"/>
                 <a:ea typeface="微软雅黑"/>
               </a:rPr>
-              <a:t>DAC 一个项目触及 11 门课，其中 6 门一个知识点都还没建。拉取的 158 个知识点里，97 个属于项目专有知识（DMD 结构光、144 孔编号、这台设备的触发时序），任何课程大纲里都没有——</a:t>
+              <a:t>DAC 一个项目触及 12 门课，其中 0 门一个知识点都还没建。拉取的 232 个知识点里，97 个属于项目专有知识（DMD 结构光、144 孔编号、这台设备的触发时序），任何课程大纲里都没有——</a:t>
             </a:r>
             <a:r>
               <a:rPr lang="zh-CN" altLang="en-US" sz="1100" b="1" dirty="0">
@@ -3444,17 +3444,17 @@
         </p:nvGraphicFramePr>
         <p:xfrm>
           <a:off x="720000" y="2750000"/>
-          <a:ext cx="10752000" cy="2000000"/>
+          <a:ext cx="10752000" cy="2400000"/>
         </p:xfrm>
         <a:graphic>
           <a:graphicData uri="http://schemas.openxmlformats.org/drawingml/2006/table">
             <a:tbl>
               <a:tblPr firstRow="1"/>
               <a:tblGrid>
-                <a:gridCol w="2321454"/>
-                <a:gridCol w="3543272"/>
-                <a:gridCol w="1710545"/>
-                <a:gridCol w="3176727"/>
+                <a:gridCol w="4569600"/>
+                <a:gridCol w="2553600"/>
+                <a:gridCol w="1881599"/>
+                <a:gridCol w="1747200"/>
               </a:tblGrid>
               <a:tr h="400000">
                 <a:tc>
@@ -3479,7 +3479,7 @@
                           <a:latin typeface="Segoe UI"/>
                           <a:ea typeface="微软雅黑"/>
                         </a:rPr>
-                        <a:t>知识点代码</a:t>
+                        <a:t>队列给出的顺序</a:t>
                       </a:r>
                     </a:p>
                   </a:txBody>
@@ -3516,7 +3516,7 @@
                           <a:latin typeface="Segoe UI"/>
                           <a:ea typeface="微软雅黑"/>
                         </a:rPr>
-                        <a:t>归属课程</a:t>
+                        <a:t>欠几个点</a:t>
                       </a:r>
                     </a:p>
                   </a:txBody>
@@ -3553,7 +3553,7 @@
                           <a:latin typeface="Segoe UI"/>
                           <a:ea typeface="微软雅黑"/>
                         </a:rPr>
-                        <a:t>被几处需要</a:t>
+                        <a:t>建了多少</a:t>
                       </a:r>
                     </a:p>
                   </a:txBody>
@@ -3590,7 +3590,7 @@
                           <a:latin typeface="Segoe UI"/>
                           <a:ea typeface="微软雅黑"/>
                         </a:rPr>
-                        <a:t>谁在要</a:t>
+                        <a:t>现在</a:t>
                       </a:r>
                     </a:p>
                   </a:txBody>
@@ -3629,7 +3629,7 @@
                           <a:latin typeface="Segoe UI"/>
                           <a:ea typeface="微软雅黑"/>
                         </a:rPr>
-                        <a:t>COA-SETUP</a:t>
+                        <a:t>具身感知与多传感器融合</a:t>
                       </a:r>
                     </a:p>
                   </a:txBody>
@@ -3666,7 +3666,7 @@
                           <a:latin typeface="Segoe UI"/>
                           <a:ea typeface="微软雅黑"/>
                         </a:rPr>
-                        <a:t>计算机组成原理</a:t>
+                        <a:t>2（被需求 4 次）</a:t>
                       </a:r>
                     </a:p>
                   </a:txBody>
@@ -3703,7 +3703,7 @@
                           <a:latin typeface="Segoe UI"/>
                           <a:ea typeface="微软雅黑"/>
                         </a:rPr>
-                        <a:t>2</a:t>
+                        <a:t>24</a:t>
                       </a:r>
                     </a:p>
                   </a:txBody>
@@ -3740,7 +3740,7 @@
                           <a:latin typeface="Segoe UI"/>
                           <a:ea typeface="微软雅黑"/>
                         </a:rPr>
-                        <a:t>关卡五 编码器四倍频 / 触发时序图</a:t>
+                        <a:t>✓ 已建</a:t>
                       </a:r>
                     </a:p>
                   </a:txBody>
@@ -3779,7 +3779,7 @@
                           <a:latin typeface="Segoe UI"/>
                           <a:ea typeface="微软雅黑"/>
                         </a:rPr>
-                        <a:t>EPS-CALIB</a:t>
+                        <a:t>计算机组成原理</a:t>
                       </a:r>
                     </a:p>
                   </a:txBody>
@@ -3816,7 +3816,7 @@
                           <a:latin typeface="Segoe UI"/>
                           <a:ea typeface="微软雅黑"/>
                         </a:rPr>
-                        <a:t>具身感知与多传感器融合</a:t>
+                        <a:t>2（被需求 3 次）</a:t>
                       </a:r>
                     </a:p>
                   </a:txBody>
@@ -3853,7 +3853,7 @@
                           <a:latin typeface="Segoe UI"/>
                           <a:ea typeface="微软雅黑"/>
                         </a:rPr>
-                        <a:t>2</a:t>
+                        <a:t>23</a:t>
                       </a:r>
                     </a:p>
                   </a:txBody>
@@ -3890,7 +3890,7 @@
                           <a:latin typeface="Segoe UI"/>
                           <a:ea typeface="微软雅黑"/>
                         </a:rPr>
-                        <a:t>关卡二 接入相机 / 关卡三 标定采集</a:t>
+                        <a:t>✓ 已建</a:t>
                       </a:r>
                     </a:p>
                   </a:txBody>
@@ -3929,7 +3929,7 @@
                           <a:latin typeface="Segoe UI"/>
                           <a:ea typeface="微软雅黑"/>
                         </a:rPr>
-                        <a:t>PROB-ERR</a:t>
+                        <a:t>概率论与数理统计A</a:t>
                       </a:r>
                     </a:p>
                   </a:txBody>
@@ -3966,7 +3966,7 @@
                           <a:latin typeface="Segoe UI"/>
                           <a:ea typeface="微软雅黑"/>
                         </a:rPr>
-                        <a:t>概率论与数理统计A</a:t>
+                        <a:t>2</a:t>
                       </a:r>
                     </a:p>
                   </a:txBody>
@@ -4003,7 +4003,7 @@
                           <a:latin typeface="Segoe UI"/>
                           <a:ea typeface="微软雅黑"/>
                         </a:rPr>
-                        <a:t>1</a:t>
+                        <a:t>22</a:t>
                       </a:r>
                     </a:p>
                   </a:txBody>
@@ -4040,7 +4040,7 @@
                           <a:latin typeface="Segoe UI"/>
                           <a:ea typeface="微软雅黑"/>
                         </a:rPr>
-                        <a:t>关卡三 拟合标定曲线与误差分析</a:t>
+                        <a:t>✓ 已建</a:t>
                       </a:r>
                     </a:p>
                   </a:txBody>
@@ -4079,7 +4079,7 @@
                           <a:latin typeface="Segoe UI"/>
                           <a:ea typeface="微软雅黑"/>
                         </a:rPr>
-                        <a:t>LA-COND</a:t>
+                        <a:t>数据库与向量数据库</a:t>
                       </a:r>
                     </a:p>
                   </a:txBody>
@@ -4116,7 +4116,7 @@
                           <a:latin typeface="Segoe UI"/>
                           <a:ea typeface="微软雅黑"/>
                         </a:rPr>
-                        <a:t>线性代数A</a:t>
+                        <a:t>2</a:t>
                       </a:r>
                     </a:p>
                   </a:txBody>
@@ -4153,7 +4153,7 @@
                           <a:latin typeface="Segoe UI"/>
                           <a:ea typeface="微软雅黑"/>
                         </a:rPr>
-                        <a:t>1</a:t>
+                        <a:t>23</a:t>
                       </a:r>
                     </a:p>
                   </a:txBody>
@@ -4190,7 +4190,157 @@
                           <a:latin typeface="Segoe UI"/>
                           <a:ea typeface="微软雅黑"/>
                         </a:rPr>
-                        <a:t>关卡三 拟合标定曲线与误差分析</a:t>
+                        <a:t>✓ 已建</a:t>
+                      </a:r>
+                    </a:p>
+                  </a:txBody>
+                  <a:tcPr marL="91440" marR="91440" marT="45720" marB="45720" anchor="ctr">
+                    <a:lnB w="6350">
+                      <a:solidFill>
+                        <a:srgbClr val="E5E7EB"/>
+                      </a:solidFill>
+                    </a:lnB>
+                    <a:solidFill>
+                      <a:srgbClr val="FFFFFF"/>
+                    </a:solidFill>
+                  </a:tcPr>
+                </a:tc>
+              </a:tr>
+              <a:tr h="400000">
+                <a:tc>
+                  <a:txBody>
+                    <a:bodyPr/>
+                    <a:lstStyle/>
+                    <a:p>
+                      <a:pPr lvl="0" marL="0" indent="0" algn="l">
+                        <a:lnSpc>
+                          <a:spcPct val="118000"/>
+                        </a:lnSpc>
+                        <a:spcBef>
+                          <a:spcPts val="0"/>
+                        </a:spcBef>
+                        <a:buNone/>
+                      </a:pPr>
+                      <a:r>
+                        <a:rPr lang="zh-CN" altLang="en-US" sz="1300" dirty="0">
+                          <a:solidFill>
+                            <a:srgbClr val="333333"/>
+                          </a:solidFill>
+                          <a:latin typeface="Segoe UI"/>
+                          <a:ea typeface="微软雅黑"/>
+                        </a:rPr>
+                        <a:t>线性代数A / 面向对象 / 算法 / Python</a:t>
+                      </a:r>
+                    </a:p>
+                  </a:txBody>
+                  <a:tcPr marL="91440" marR="91440" marT="45720" marB="45720" anchor="ctr">
+                    <a:lnB w="6350">
+                      <a:solidFill>
+                        <a:srgbClr val="E5E7EB"/>
+                      </a:solidFill>
+                    </a:lnB>
+                    <a:solidFill>
+                      <a:srgbClr val="FFFFFF"/>
+                    </a:solidFill>
+                  </a:tcPr>
+                </a:tc>
+                <a:tc>
+                  <a:txBody>
+                    <a:bodyPr/>
+                    <a:lstStyle/>
+                    <a:p>
+                      <a:pPr lvl="0" marL="0" indent="0" algn="l">
+                        <a:lnSpc>
+                          <a:spcPct val="118000"/>
+                        </a:lnSpc>
+                        <a:spcBef>
+                          <a:spcPts val="0"/>
+                        </a:spcBef>
+                        <a:buNone/>
+                      </a:pPr>
+                      <a:r>
+                        <a:rPr lang="zh-CN" altLang="en-US" sz="1300" dirty="0">
+                          <a:solidFill>
+                            <a:srgbClr val="333333"/>
+                          </a:solidFill>
+                          <a:latin typeface="Segoe UI"/>
+                          <a:ea typeface="微软雅黑"/>
+                        </a:rPr>
+                        <a:t>各 1</a:t>
+                      </a:r>
+                    </a:p>
+                  </a:txBody>
+                  <a:tcPr marL="91440" marR="91440" marT="45720" marB="45720" anchor="ctr">
+                    <a:lnB w="6350">
+                      <a:solidFill>
+                        <a:srgbClr val="E5E7EB"/>
+                      </a:solidFill>
+                    </a:lnB>
+                    <a:solidFill>
+                      <a:srgbClr val="FFFFFF"/>
+                    </a:solidFill>
+                  </a:tcPr>
+                </a:tc>
+                <a:tc>
+                  <a:txBody>
+                    <a:bodyPr/>
+                    <a:lstStyle/>
+                    <a:p>
+                      <a:pPr lvl="0" marL="0" indent="0" algn="l">
+                        <a:lnSpc>
+                          <a:spcPct val="118000"/>
+                        </a:lnSpc>
+                        <a:spcBef>
+                          <a:spcPts val="0"/>
+                        </a:spcBef>
+                        <a:buNone/>
+                      </a:pPr>
+                      <a:r>
+                        <a:rPr lang="zh-CN" altLang="en-US" sz="1300" dirty="0">
+                          <a:solidFill>
+                            <a:srgbClr val="333333"/>
+                          </a:solidFill>
+                          <a:latin typeface="Segoe UI"/>
+                          <a:ea typeface="微软雅黑"/>
+                        </a:rPr>
+                        <a:t>21–23</a:t>
+                      </a:r>
+                    </a:p>
+                  </a:txBody>
+                  <a:tcPr marL="91440" marR="91440" marT="45720" marB="45720" anchor="ctr">
+                    <a:lnB w="6350">
+                      <a:solidFill>
+                        <a:srgbClr val="E5E7EB"/>
+                      </a:solidFill>
+                    </a:lnB>
+                    <a:solidFill>
+                      <a:srgbClr val="FFFFFF"/>
+                    </a:solidFill>
+                  </a:tcPr>
+                </a:tc>
+                <a:tc>
+                  <a:txBody>
+                    <a:bodyPr/>
+                    <a:lstStyle/>
+                    <a:p>
+                      <a:pPr lvl="0" marL="0" indent="0" algn="l">
+                        <a:lnSpc>
+                          <a:spcPct val="118000"/>
+                        </a:lnSpc>
+                        <a:spcBef>
+                          <a:spcPts val="0"/>
+                        </a:spcBef>
+                        <a:buNone/>
+                      </a:pPr>
+                      <a:r>
+                        <a:rPr lang="zh-CN" altLang="en-US" sz="1300" dirty="0">
+                          <a:solidFill>
+                            <a:srgbClr val="333333"/>
+                          </a:solidFill>
+                          <a:latin typeface="Segoe UI"/>
+                          <a:ea typeface="微软雅黑"/>
+                        </a:rPr>
+                        <a:t>✓ 已建</a:t>
                       </a:r>
                     </a:p>
                   </a:txBody>
@@ -4218,8 +4368,8 @@
         </p:nvSpPr>
         <p:spPr>
           <a:xfrm>
-            <a:off x="720000" y="5010000"/>
-            <a:ext cx="10752000" cy="1048000"/>
+            <a:off x="720000" y="5410000"/>
+            <a:ext cx="10752000" cy="648000"/>
           </a:xfrm>
           <a:prstGeom prst="rect">
             <a:avLst/>
@@ -4282,7 +4432,7 @@
                 <a:latin typeface="Segoe UI"/>
                 <a:ea typeface="微软雅黑"/>
               </a:rPr>
-              <a:t>系统登记下来、按被需求次数排序，</a:t>
+              <a:t>系统按被需求次数排序给出建设顺序，</a:t>
             </a:r>
             <a:r>
               <a:rPr lang="zh-CN" altLang="en-US" sz="1900" b="1" dirty="0">
@@ -4302,7 +4452,7 @@
                 <a:latin typeface="Segoe UI"/>
                 <a:ea typeface="微软雅黑"/>
               </a:rPr>
-              <a:t>——队列会自己变短。</a:t>
+              <a:t>。</a:t>
             </a:r>
           </a:p>
           <a:p>
@@ -4324,7 +4474,7 @@
                 <a:latin typeface="Segoe UI"/>
                 <a:ea typeface="微软雅黑"/>
               </a:rPr>
-              <a:t>当前队列 12 个知识点。</a:t>
+              <a:t>照着这个队列建完了：8 门课、179 个知识点，队列现在是空的。</a:t>
             </a:r>
             <a:r>
               <a:rPr lang="zh-CN" altLang="en-US" sz="1900" dirty="0">
@@ -4334,7 +4484,7 @@
                 <a:latin typeface="Segoe UI"/>
                 <a:ea typeface="微软雅黑"/>
               </a:rPr>
-              <a:t> 高数不必一开始就建 300 个点，先建被拉取的那几十个，随项目增长。</a:t>
+              <a:t>没有一门课是「因为课表上有」才建的——每一个点都有具体的任务在要它。</a:t>
             </a:r>
           </a:p>
         </p:txBody>
@@ -6911,12 +7061,12 @@
             <a:tbl>
               <a:tblPr firstRow="1"/>
               <a:tblGrid>
-                <a:gridCol w="2810181"/>
-                <a:gridCol w="1099636"/>
+                <a:gridCol w="3176727"/>
+                <a:gridCol w="977454"/>
                 <a:gridCol w="1221818"/>
                 <a:gridCol w="1344000"/>
-                <a:gridCol w="1099636"/>
-                <a:gridCol w="3176727"/>
+                <a:gridCol w="977454"/>
+                <a:gridCol w="3054545"/>
               </a:tblGrid>
               <a:tr h="400000">
                 <a:tc>
@@ -7165,7 +7315,7 @@
                           <a:latin typeface="Segoe UI"/>
                           <a:ea typeface="微软雅黑"/>
                         </a:rPr>
-                        <a:t>高等数学B（上）</a:t>
+                        <a:t>线性代数A</a:t>
                       </a:r>
                     </a:p>
                   </a:txBody>
@@ -7202,7 +7352,7 @@
                           <a:latin typeface="Segoe UI"/>
                           <a:ea typeface="微软雅黑"/>
                         </a:rPr>
-                        <a:t>3</a:t>
+                        <a:t>26</a:t>
                       </a:r>
                     </a:p>
                   </a:txBody>
@@ -7276,7 +7426,7 @@
                           <a:latin typeface="Segoe UI"/>
                           <a:ea typeface="微软雅黑"/>
                         </a:rPr>
-                        <a:t>33%</a:t>
+                        <a:t>4%</a:t>
                       </a:r>
                     </a:p>
                   </a:txBody>
@@ -7350,17 +7500,7 @@
                           <a:latin typeface="Segoe UI"/>
                           <a:ea typeface="微软雅黑"/>
                         </a:rPr>
-                        <a:t>图谱仅建 3 个点，</a:t>
-                      </a:r>
-                      <a:r>
-                        <a:rPr lang="zh-CN" altLang="en-US" sz="1300" b="1" dirty="0">
-                          <a:solidFill>
-                            <a:srgbClr val="333333"/>
-                          </a:solidFill>
-                          <a:latin typeface="Segoe UI"/>
-                          <a:ea typeface="微软雅黑"/>
-                        </a:rPr>
-                        <a:t>判不了</a:t>
+                        <a:t>覆盖度未达 25%</a:t>
                       </a:r>
                     </a:p>
                   </a:txBody>
@@ -7399,7 +7539,7 @@
                           <a:latin typeface="Segoe UI"/>
                           <a:ea typeface="微软雅黑"/>
                         </a:rPr>
-                        <a:t>线性代数A</a:t>
+                        <a:t>概率论与数理统计A</a:t>
                       </a:r>
                     </a:p>
                   </a:txBody>
@@ -7436,7 +7576,7 @@
                           <a:latin typeface="Segoe UI"/>
                           <a:ea typeface="微软雅黑"/>
                         </a:rPr>
-                        <a:t>5</a:t>
+                        <a:t>27</a:t>
                       </a:r>
                     </a:p>
                   </a:txBody>
@@ -7510,7 +7650,7 @@
                           <a:latin typeface="Segoe UI"/>
                           <a:ea typeface="微软雅黑"/>
                         </a:rPr>
-                        <a:t>20%</a:t>
+                        <a:t>4%</a:t>
                       </a:r>
                     </a:p>
                   </a:txBody>
@@ -7584,17 +7724,7 @@
                           <a:latin typeface="Segoe UI"/>
                           <a:ea typeface="微软雅黑"/>
                         </a:rPr>
-                        <a:t>图谱仅建 5 个点，</a:t>
-                      </a:r>
-                      <a:r>
-                        <a:rPr lang="zh-CN" altLang="en-US" sz="1300" b="1" dirty="0">
-                          <a:solidFill>
-                            <a:srgbClr val="333333"/>
-                          </a:solidFill>
-                          <a:latin typeface="Segoe UI"/>
-                          <a:ea typeface="微软雅黑"/>
-                        </a:rPr>
-                        <a:t>判不了</a:t>
+                        <a:t>覆盖度未达 25%</a:t>
                       </a:r>
                     </a:p>
                   </a:txBody>
@@ -7633,7 +7763,7 @@
                           <a:latin typeface="Segoe UI"/>
                           <a:ea typeface="微软雅黑"/>
                         </a:rPr>
-                        <a:t>概率论与数理统计A</a:t>
+                        <a:t>具身感知与多传感器融合</a:t>
                       </a:r>
                     </a:p>
                   </a:txBody>
@@ -7670,7 +7800,7 @@
                           <a:latin typeface="Segoe UI"/>
                           <a:ea typeface="微软雅黑"/>
                         </a:rPr>
-                        <a:t>5</a:t>
+                        <a:t>24</a:t>
                       </a:r>
                     </a:p>
                   </a:txBody>
@@ -7707,7 +7837,7 @@
                           <a:latin typeface="Segoe UI"/>
                           <a:ea typeface="微软雅黑"/>
                         </a:rPr>
-                        <a:t>1</a:t>
+                        <a:t>0</a:t>
                       </a:r>
                     </a:p>
                   </a:txBody>
@@ -7744,7 +7874,7 @@
                           <a:latin typeface="Segoe UI"/>
                           <a:ea typeface="微软雅黑"/>
                         </a:rPr>
-                        <a:t>20%</a:t>
+                        <a:t>0%</a:t>
                       </a:r>
                     </a:p>
                   </a:txBody>
@@ -7818,17 +7948,7 @@
                           <a:latin typeface="Segoe UI"/>
                           <a:ea typeface="微软雅黑"/>
                         </a:rPr>
-                        <a:t>图谱仅建 5 个点，</a:t>
-                      </a:r>
-                      <a:r>
-                        <a:rPr lang="zh-CN" altLang="en-US" sz="1300" b="1" dirty="0">
-                          <a:solidFill>
-                            <a:srgbClr val="333333"/>
-                          </a:solidFill>
-                          <a:latin typeface="Segoe UI"/>
-                          <a:ea typeface="微软雅黑"/>
-                        </a:rPr>
-                        <a:t>判不了</a:t>
+                        <a:t>覆盖度未达 25%</a:t>
                       </a:r>
                     </a:p>
                   </a:txBody>
@@ -7860,6 +7980,43 @@
                         <a:buNone/>
                       </a:pPr>
                       <a:r>
+                        <a:rPr lang="zh-CN" altLang="en-US" sz="1300" b="1" dirty="0">
+                          <a:solidFill>
+                            <a:srgbClr val="333333"/>
+                          </a:solidFill>
+                          <a:latin typeface="Segoe UI"/>
+                          <a:ea typeface="微软雅黑"/>
+                        </a:rPr>
+                        <a:t>专业综合实习</a:t>
+                      </a:r>
+                    </a:p>
+                  </a:txBody>
+                  <a:tcPr marL="91440" marR="91440" marT="45720" marB="45720" anchor="ctr">
+                    <a:lnB w="6350">
+                      <a:solidFill>
+                        <a:srgbClr val="E5E7EB"/>
+                      </a:solidFill>
+                    </a:lnB>
+                    <a:solidFill>
+                      <a:srgbClr val="FFFFFF"/>
+                    </a:solidFill>
+                  </a:tcPr>
+                </a:tc>
+                <a:tc>
+                  <a:txBody>
+                    <a:bodyPr/>
+                    <a:lstStyle/>
+                    <a:p>
+                      <a:pPr lvl="0" marL="0" indent="0" algn="l">
+                        <a:lnSpc>
+                          <a:spcPct val="118000"/>
+                        </a:lnSpc>
+                        <a:spcBef>
+                          <a:spcPts val="0"/>
+                        </a:spcBef>
+                        <a:buNone/>
+                      </a:pPr>
+                      <a:r>
                         <a:rPr lang="zh-CN" altLang="en-US" sz="1300" dirty="0">
                           <a:solidFill>
                             <a:srgbClr val="333333"/>
@@ -7867,7 +8024,7 @@
                           <a:latin typeface="Segoe UI"/>
                           <a:ea typeface="微软雅黑"/>
                         </a:rPr>
-                        <a:t>机器学习</a:t>
+                        <a:t>97</a:t>
                       </a:r>
                     </a:p>
                   </a:txBody>
@@ -7904,7 +8061,7 @@
                           <a:latin typeface="Segoe UI"/>
                           <a:ea typeface="微软雅黑"/>
                         </a:rPr>
-                        <a:t>128</a:t>
+                        <a:t>0</a:t>
                       </a:r>
                     </a:p>
                   </a:txBody>
@@ -7941,7 +8098,7 @@
                           <a:latin typeface="Segoe UI"/>
                           <a:ea typeface="微软雅黑"/>
                         </a:rPr>
-                        <a:t>4</a:t>
+                        <a:t>0%</a:t>
                       </a:r>
                     </a:p>
                   </a:txBody>
@@ -7978,7 +8135,7 @@
                           <a:latin typeface="Segoe UI"/>
                           <a:ea typeface="微软雅黑"/>
                         </a:rPr>
-                        <a:t>3%</a:t>
+                        <a:t>—</a:t>
                       </a:r>
                     </a:p>
                   </a:txBody>
@@ -8015,44 +8172,17 @@
                           <a:latin typeface="Segoe UI"/>
                           <a:ea typeface="微软雅黑"/>
                         </a:rPr>
-                        <a:t>—</a:t>
-                      </a:r>
-                    </a:p>
-                  </a:txBody>
-                  <a:tcPr marL="91440" marR="91440" marT="45720" marB="45720" anchor="ctr">
-                    <a:lnB w="6350">
-                      <a:solidFill>
-                        <a:srgbClr val="E5E7EB"/>
-                      </a:solidFill>
-                    </a:lnB>
-                    <a:solidFill>
-                      <a:srgbClr val="FFFFFF"/>
-                    </a:solidFill>
-                  </a:tcPr>
-                </a:tc>
-                <a:tc>
-                  <a:txBody>
-                    <a:bodyPr/>
-                    <a:lstStyle/>
-                    <a:p>
-                      <a:pPr lvl="0" marL="0" indent="0" algn="l">
-                        <a:lnSpc>
-                          <a:spcPct val="118000"/>
-                        </a:lnSpc>
-                        <a:spcBef>
-                          <a:spcPts val="0"/>
-                        </a:spcBef>
-                        <a:buNone/>
-                      </a:pPr>
-                      <a:r>
-                        <a:rPr lang="zh-CN" altLang="en-US" sz="1300" dirty="0">
+                        <a:t>经 DAC 项目折算；</a:t>
+                      </a:r>
+                      <a:r>
+                        <a:rPr lang="zh-CN" altLang="en-US" sz="1300" b="1" dirty="0">
                           <a:solidFill>
                             <a:srgbClr val="333333"/>
                           </a:solidFill>
                           <a:latin typeface="Segoe UI"/>
                           <a:ea typeface="微软雅黑"/>
                         </a:rPr>
-                        <a:t>覆盖度未达 25%</a:t>
+                        <a:t>另需 12 个里程碑验收，系统不代签</a:t>
                       </a:r>
                     </a:p>
                   </a:txBody>
@@ -8091,7 +8221,7 @@
                           <a:latin typeface="Segoe UI"/>
                           <a:ea typeface="微软雅黑"/>
                         </a:rPr>
-                        <a:t>深度学习</a:t>
+                        <a:t>高等数学B（上）</a:t>
                       </a:r>
                     </a:p>
                   </a:txBody>
@@ -8128,7 +8258,7 @@
                           <a:latin typeface="Segoe UI"/>
                           <a:ea typeface="微软雅黑"/>
                         </a:rPr>
-                        <a:t>40</a:t>
+                        <a:t>3</a:t>
                       </a:r>
                     </a:p>
                   </a:txBody>
@@ -8165,7 +8295,7 @@
                           <a:latin typeface="Segoe UI"/>
                           <a:ea typeface="微软雅黑"/>
                         </a:rPr>
-                        <a:t>0</a:t>
+                        <a:t>1</a:t>
                       </a:r>
                     </a:p>
                   </a:txBody>
@@ -8202,7 +8332,7 @@
                           <a:latin typeface="Segoe UI"/>
                           <a:ea typeface="微软雅黑"/>
                         </a:rPr>
-                        <a:t>0%</a:t>
+                        <a:t>33%</a:t>
                       </a:r>
                     </a:p>
                   </a:txBody>
@@ -8276,7 +8406,17 @@
                           <a:latin typeface="Segoe UI"/>
                           <a:ea typeface="微软雅黑"/>
                         </a:rPr>
-                        <a:t>覆盖度未达 25%</a:t>
+                        <a:t>图谱仅 3 个点，</a:t>
+                      </a:r>
+                      <a:r>
+                        <a:rPr lang="zh-CN" altLang="en-US" sz="1300" b="1" dirty="0">
+                          <a:solidFill>
+                            <a:srgbClr val="333333"/>
+                          </a:solidFill>
+                          <a:latin typeface="Segoe UI"/>
+                          <a:ea typeface="微软雅黑"/>
+                        </a:rPr>
+                        <a:t>判不了</a:t>
                       </a:r>
                     </a:p>
                   </a:txBody>
@@ -8462,6 +8602,58 @@
                 <a:latin typeface="Segoe UI"/>
                 <a:ea typeface="微软雅黑"/>
               </a:rPr>
+              <a:t>项目专有知识走集中实践环节。</a:t>
+            </a:r>
+            <a:r>
+              <a:rPr lang="zh-CN" altLang="en-US" sz="1900" dirty="0">
+                <a:solidFill>
+                  <a:srgbClr val="1B1F24"/>
+                </a:solidFill>
+                <a:latin typeface="Segoe UI"/>
+                <a:ea typeface="微软雅黑"/>
+              </a:rPr>
+              <a:t> DAC 拉取的 232 个知识点里有 97 个（DMD 结构光、144 孔编号、这台设备的触发时序）在任何理论课大纲里都没有——硬塞进某门理论课凑覆盖度会毁掉认定的可信度，但学生确实做了，所以绑到</a:t>
+            </a:r>
+            <a:r>
+              <a:rPr lang="zh-CN" altLang="en-US" sz="1900" b="1" dirty="0">
+                <a:solidFill>
+                  <a:srgbClr val="1B1F24"/>
+                </a:solidFill>
+                <a:latin typeface="Segoe UI"/>
+                <a:ea typeface="微软雅黑"/>
+              </a:rPr>
+              <a:t>专业综合实习 G18Z41029</a:t>
+            </a:r>
+            <a:r>
+              <a:rPr lang="zh-CN" altLang="en-US" sz="1900" dirty="0">
+                <a:solidFill>
+                  <a:srgbClr val="1B1F24"/>
+                </a:solidFill>
+                <a:latin typeface="Segoe UI"/>
+                <a:ea typeface="微软雅黑"/>
+              </a:rPr>
+              <a:t> 上。一个项目只能绑一门，否则同一份工作认两次。</a:t>
+            </a:r>
+          </a:p>
+          <a:p>
+            <a:pPr lvl="0" marL="320000" indent="-320000" algn="l">
+              <a:lnSpc>
+                <a:spcPct val="118000"/>
+              </a:lnSpc>
+              <a:spcBef>
+                <a:spcPts val="340"/>
+              </a:spcBef>
+              <a:buFont typeface="Arial"/>
+              <a:buChar char="▪"/>
+            </a:pPr>
+            <a:r>
+              <a:rPr lang="zh-CN" altLang="en-US" sz="1900" b="1" dirty="0">
+                <a:solidFill>
+                  <a:srgbClr val="1B1F24"/>
+                </a:solidFill>
+                <a:latin typeface="Segoe UI"/>
+                <a:ea typeface="微软雅黑"/>
+              </a:rPr>
               <a:t>当前可认定学分：0.0。</a:t>
             </a:r>
             <a:r>
@@ -8472,7 +8664,7 @@
                 <a:latin typeface="Segoe UI"/>
                 <a:ea typeface="微软雅黑"/>
               </a:rPr>
-              <a:t> 这个数字现在难看是对的：项目刚接入、图谱刚起步、学生还没真正在系统里做这个项目。</a:t>
+              <a:t> 这个数字现在难看是对的：学生还没真正在系统里做这个项目。</a:t>
             </a:r>
           </a:p>
         </p:txBody>
@@ -8547,7 +8739,7 @@
                 <a:latin typeface="Segoe UI"/>
                 <a:ea typeface="微软雅黑"/>
               </a:rPr>
-              <a:t>另有 22 门课图谱尚未建设，无法认定——这不是学生没学，是系统还没建那门课的坐标系。把话说全，免得各位按「已经能用」来安排学期。</a:t>
+              <a:t>另有 15 门课图谱尚未建设，无法认定——这不是学生没学，是系统还没建那门课的坐标系（也没有任何项目拉取过它们）。把话说全，免得各位按「已经能用」来安排学期。</a:t>
             </a:r>
           </a:p>
         </p:txBody>
@@ -10370,7 +10562,7 @@
                 <a:latin typeface="Segoe UI"/>
                 <a:ea typeface="微软雅黑"/>
               </a:rPr>
-              <a:t>11,644</a:t>
+              <a:t>18,983</a:t>
             </a:r>
           </a:p>
         </p:txBody>
@@ -10458,7 +10650,7 @@
                 <a:latin typeface="Segoe UI"/>
                 <a:ea typeface="微软雅黑"/>
               </a:rPr>
-              <a:t>41 个任务 × 284 个知识点，逐条比对是这个量级</a:t>
+              <a:t>41 个任务 × 463 个知识点，逐条比对是这个量级</a:t>
             </a:r>
           </a:p>
           <a:p>
@@ -10636,7 +10828,7 @@
                 <a:latin typeface="Segoe UI"/>
                 <a:ea typeface="微软雅黑"/>
               </a:rPr>
-              <a:t>11 / 28</a:t>
+              <a:t>12 / 28</a:t>
             </a:r>
           </a:p>
         </p:txBody>
@@ -10745,7 +10937,7 @@
                 <a:latin typeface="Segoe UI"/>
                 <a:ea typeface="微软雅黑"/>
               </a:rPr>
-              <a:t>DAC 一个项目沿依赖边拉取 158 个知识点</a:t>
+              <a:t>DAC 一个项目沿依赖边拉取 232 个知识点</a:t>
             </a:r>
           </a:p>
           <a:p>
@@ -10787,7 +10979,7 @@
                 <a:latin typeface="Segoe UI"/>
                 <a:ea typeface="微软雅黑"/>
               </a:rPr>
-              <a:t>学生不必先修完这些课再进项目</a:t>
+              <a:t>该建哪几门课由需求队列排序，已照此建完并清空</a:t>
             </a:r>
           </a:p>
         </p:txBody>
@@ -11160,7 +11352,7 @@
                 <a:latin typeface="Segoe UI"/>
                 <a:ea typeface="微软雅黑"/>
               </a:rPr>
-              <a:t>DAC 项目触及 11 门课，拉取 158 个知识点</a:t>
+              <a:t>照需求队列建完 8 门课、179 个知识点，队列已清空</a:t>
             </a:r>
           </a:p>
           <a:p>
@@ -11182,7 +11374,7 @@
                 <a:latin typeface="Segoe UI"/>
                 <a:ea typeface="微软雅黑"/>
               </a:rPr>
-              <a:t>悬空需求队列 + 自动匹配 + 教师裁决全链路</a:t>
+              <a:t>DAC 触及 12 门课，拉取 232 个知识点</a:t>
             </a:r>
           </a:p>
           <a:p>
@@ -11204,7 +11396,7 @@
                 <a:latin typeface="Segoe UI"/>
                 <a:ea typeface="微软雅黑"/>
               </a:rPr>
-              <a:t>学分认定视图（含「判不了」）</a:t>
+              <a:t>项目专有知识经专业综合实习折算学分</a:t>
             </a:r>
           </a:p>
         </p:txBody>
@@ -11301,7 +11493,17 @@
                 <a:latin typeface="Segoe UI"/>
                 <a:ea typeface="微软雅黑"/>
               </a:rPr>
-              <a:t>6 门被需要的课，图谱一个点没建</a:t>
+              <a:t>新建的 179 个知识点</a:t>
+            </a:r>
+            <a:r>
+              <a:rPr lang="zh-CN" altLang="en-US" sz="1200" b="1" dirty="0">
+                <a:solidFill>
+                  <a:srgbClr val="333333"/>
+                </a:solidFill>
+                <a:latin typeface="Segoe UI"/>
+                <a:ea typeface="微软雅黑"/>
+              </a:rPr>
+              <a:t>没有教师审过</a:t>
             </a:r>
           </a:p>
           <a:p>
@@ -11323,17 +11525,7 @@
                 <a:latin typeface="Segoe UI"/>
                 <a:ea typeface="微软雅黑"/>
               </a:rPr>
-              <a:t>候选质量只有自测数字，</a:t>
-            </a:r>
-            <a:r>
-              <a:rPr lang="zh-CN" altLang="en-US" sz="1200" b="1" dirty="0">
-                <a:solidFill>
-                  <a:srgbClr val="333333"/>
-                </a:solidFill>
-                <a:latin typeface="Segoe UI"/>
-                <a:ea typeface="微软雅黑"/>
-              </a:rPr>
-              <a:t>没有教师实审过</a:t>
+              <a:t>候选质量只有自测数字，没有教师实审过</a:t>
             </a:r>
           </a:p>
           <a:p>
@@ -11474,7 +11666,7 @@
                 <a:latin typeface="Segoe UI"/>
                 <a:ea typeface="微软雅黑"/>
               </a:rPr>
-              <a:t>先建哪门课：队列给了顺序，要各位点头</a:t>
+              <a:t>新建知识点的粒度与措辞对不对</a:t>
             </a:r>
           </a:p>
           <a:p>
@@ -11496,7 +11688,7 @@
                 <a:latin typeface="Segoe UI"/>
                 <a:ea typeface="微软雅黑"/>
               </a:rPr>
-              <a:t>认定门槛：图谱建到多少个点才敢下结论</a:t>
+              <a:t>关卡验收由谁签字、几人签</a:t>
             </a:r>
           </a:p>
           <a:p>
@@ -11540,7 +11732,7 @@
                 <a:latin typeface="Segoe UI"/>
                 <a:ea typeface="微软雅黑"/>
               </a:rPr>
-              <a:t>关卡验收由谁签字、几人签</a:t>
+              <a:t>毕业设计要不要也绑项目</a:t>
             </a:r>
           </a:p>
         </p:txBody>
@@ -16146,7 +16338,7 @@
                 <a:latin typeface="Segoe UI"/>
                 <a:ea typeface="微软雅黑"/>
               </a:rPr>
-              <a:t>128</a:t>
+              <a:t>463</a:t>
             </a:r>
           </a:p>
         </p:txBody>
@@ -16190,7 +16382,7 @@
                 <a:latin typeface="Segoe UI"/>
                 <a:ea typeface="微软雅黑"/>
               </a:rPr>
-              <a:t>机器学习</a:t>
+              <a:t>全图知识点</a:t>
             </a:r>
           </a:p>
         </p:txBody>
@@ -16203,8 +16395,8 @@
         </p:nvSpPr>
         <p:spPr>
           <a:xfrm>
-            <a:off x="2892400" y="4686750"/>
-            <a:ext cx="2062400" cy="1121250"/>
+            <a:off x="2892400" y="4816070"/>
+            <a:ext cx="2062400" cy="991930"/>
           </a:xfrm>
           <a:prstGeom prst="roundRect">
             <a:avLst>
@@ -16234,7 +16426,7 @@
         </p:nvSpPr>
         <p:spPr>
           <a:xfrm>
-            <a:off x="2892400" y="4426750"/>
+            <a:off x="2892400" y="4556070"/>
             <a:ext cx="2062400" cy="220000"/>
           </a:xfrm>
           <a:prstGeom prst="rect">
@@ -16265,7 +16457,7 @@
                 <a:latin typeface="Segoe UI"/>
                 <a:ea typeface="微软雅黑"/>
               </a:rPr>
-              <a:t>40</a:t>
+              <a:t>128</a:t>
             </a:r>
           </a:p>
         </p:txBody>
@@ -16309,7 +16501,7 @@
                 <a:latin typeface="Segoe UI"/>
                 <a:ea typeface="微软雅黑"/>
               </a:rPr>
-              <a:t>深度学习</a:t>
+              <a:t>机器学习</a:t>
             </a:r>
           </a:p>
         </p:txBody>
@@ -16322,8 +16514,8 @@
         </p:nvSpPr>
         <p:spPr>
           <a:xfrm>
-            <a:off x="5064800" y="5387532"/>
-            <a:ext cx="2062400" cy="420468"/>
+            <a:off x="5064800" y="5025305"/>
+            <a:ext cx="2062400" cy="782695"/>
           </a:xfrm>
           <a:prstGeom prst="roundRect">
             <a:avLst>
@@ -16353,7 +16545,7 @@
         </p:nvSpPr>
         <p:spPr>
           <a:xfrm>
-            <a:off x="5064800" y="5127532"/>
+            <a:off x="5064800" y="4765305"/>
             <a:ext cx="2062400" cy="220000"/>
           </a:xfrm>
           <a:prstGeom prst="rect">
@@ -16384,7 +16576,7 @@
                 <a:latin typeface="Segoe UI"/>
                 <a:ea typeface="微软雅黑"/>
               </a:rPr>
-              <a:t>15</a:t>
+              <a:t>101</a:t>
             </a:r>
           </a:p>
         </p:txBody>
@@ -16428,7 +16620,7 @@
                 <a:latin typeface="Segoe UI"/>
                 <a:ea typeface="微软雅黑"/>
               </a:rPr>
-              <a:t>数学三门</a:t>
+              <a:t>DAC项目域</a:t>
             </a:r>
           </a:p>
         </p:txBody>
@@ -16441,8 +16633,8 @@
         </p:nvSpPr>
         <p:spPr>
           <a:xfrm>
-            <a:off x="7237200" y="2976844"/>
-            <a:ext cx="2062400" cy="2831156"/>
+            <a:off x="7237200" y="4420847"/>
+            <a:ext cx="2062400" cy="1387153"/>
           </a:xfrm>
           <a:prstGeom prst="roundRect">
             <a:avLst>
@@ -16472,7 +16664,7 @@
         </p:nvSpPr>
         <p:spPr>
           <a:xfrm>
-            <a:off x="7237200" y="2716844"/>
+            <a:off x="7237200" y="4160847"/>
             <a:ext cx="2062400" cy="220000"/>
           </a:xfrm>
           <a:prstGeom prst="rect">
@@ -16503,7 +16695,7 @@
                 <a:latin typeface="Segoe UI"/>
                 <a:ea typeface="微软雅黑"/>
               </a:rPr>
-              <a:t>101</a:t>
+              <a:t>179</a:t>
             </a:r>
           </a:p>
         </p:txBody>
@@ -16547,7 +16739,7 @@
                 <a:latin typeface="Segoe UI"/>
                 <a:ea typeface="微软雅黑"/>
               </a:rPr>
-              <a:t>DAC项目域</a:t>
+              <a:t>队列新建</a:t>
             </a:r>
           </a:p>
         </p:txBody>
@@ -16560,8 +16752,8 @@
         </p:nvSpPr>
         <p:spPr>
           <a:xfrm>
-            <a:off x="9409600" y="4182188"/>
-            <a:ext cx="2062400" cy="1625812"/>
+            <a:off x="9409600" y="5265538"/>
+            <a:ext cx="2062400" cy="542462"/>
           </a:xfrm>
           <a:prstGeom prst="roundRect">
             <a:avLst>
@@ -16591,7 +16783,7 @@
         </p:nvSpPr>
         <p:spPr>
           <a:xfrm>
-            <a:off x="9409600" y="3922188"/>
+            <a:off x="9409600" y="5005538"/>
             <a:ext cx="2062400" cy="220000"/>
           </a:xfrm>
           <a:prstGeom prst="rect">
@@ -16622,7 +16814,7 @@
                 <a:latin typeface="Segoe UI"/>
                 <a:ea typeface="微软雅黑"/>
               </a:rPr>
-              <a:t>58</a:t>
+              <a:t>70</a:t>
             </a:r>
           </a:p>
         </p:txBody>
@@ -16710,7 +16902,7 @@
                 <a:latin typeface="Segoe UI"/>
                 <a:ea typeface="微软雅黑"/>
               </a:rPr>
-              <a:t>跨课程边是这一步的要害，现在有 58 条：DAC-05-10「标定曲线拟合」的前置是 ML-05-01「线性回归」，而线性回归的前置又落在线性代数A 的「向量与矩阵运算」上。学生在光路关卡撞上拟合时，系统沿这条链一路把它们拉过来——他不需要先修完机器学习，更不需要先修完线性代数。</a:t>
+              <a:t>跨课程边是这一步的要害，现在有 70 条：DAC-05-10「标定曲线拟合」的前置是 ML-05-01「线性回归」，而线性回归的前置又落在线性代数A 的「向量与矩阵运算」上。学生在光路关卡撞上拟合时，系统沿这条链一路把它们拉过来——他不需要先修完机器学习，更不需要先修完线性代数。</a:t>
             </a:r>
           </a:p>
         </p:txBody>
